--- a/dist/초6/영어/듣기와읽기/초6_영어_듣기와읽기_01_핵심정보파악.pptx
+++ b/dist/초6/영어/듣기와읽기/초6_영어_듣기와읽기_01_핵심정보파악.pptx
@@ -120,19 +120,19 @@
   <p:extLst>
     <p:ext uri="{521415D9-36F7-43E2-AB2F-B90AF26B5E84}">
       <p14:sectionLst xmlns:p14="http://schemas.microsoft.com/office/powerpoint/2010/main">
-        <p14:section name="도입" id="{9d5f0a21-bf55-0be0-1fc1-3c58c7ac2e85}">
+        <p14:section name="도입" id="{167f0146-a6a8-ec92-945c-a5125f0d762f}">
           <p14:sldIdLst>
             <p14:sldId id="256"/>
             <p14:sldId id="257"/>
           </p14:sldIdLst>
         </p14:section>
-        <p14:section name="개념" id="{3b3f80e4-46ed-0e37-320b-fccf9d341de4}">
+        <p14:section name="개념" id="{d8b671c6-b518-33db-45e1-29dd0a2bb954}">
           <p14:sldIdLst>
             <p14:sldId id="258"/>
             <p14:sldId id="259"/>
           </p14:sldIdLst>
         </p14:section>
-        <p14:section name="연습" id="{69343bbf-4b6f-92c3-8dca-a050e98e3092}">
+        <p14:section name="연습" id="{f69088fc-ff66-92c7-f8e3-241e980cbe2d}">
           <p14:sldIdLst>
             <p14:sldId id="260"/>
             <p14:sldId id="261"/>
@@ -141,19 +141,19 @@
             <p14:sldId id="264"/>
           </p14:sldIdLst>
         </p14:section>
-        <p14:section name="확인" id="{0caeda25-ad71-9c69-3d4b-e1cd858ac953}">
+        <p14:section name="확인" id="{fbcd3d0c-84e3-e805-282c-0da0abf47003}">
           <p14:sldIdLst>
             <p14:sldId id="265"/>
             <p14:sldId id="266"/>
             <p14:sldId id="267"/>
           </p14:sldIdLst>
         </p14:section>
-        <p14:section name="정리" id="{18392a18-4e67-2435-c74d-acd98d758457}">
+        <p14:section name="정리" id="{e3d8b278-3e03-d6e1-5f26-c103ccf75fc5}">
           <p14:sldIdLst>
             <p14:sldId id="268"/>
           </p14:sldIdLst>
         </p14:section>
-        <p14:section name="보충" id="{cc0ed639-efc5-3838-166b-cd0150fc94b4}">
+        <p14:section name="보충" id="{31cc5488-f599-8c6b-03aa-22f1fac72cef}">
           <p14:sldIdLst>
             <p14:sldId id="269"/>
           </p14:sldIdLst>
